--- a/assets/lessons/telescope-research/public-use-poster.pptx
+++ b/assets/lessons/telescope-research/public-use-poster.pptx
@@ -18018,104 +18018,6 @@
       </p:sp>
       <p:sp>
         <p:nvSpPr>
-          <p:cNvPr id="114" name="DSPIRA 1">
-            <a:extLst>
-              <a:ext uri="{FF2B5EF4-FFF2-40B4-BE49-F238E27FC236}">
-                <a16:creationId xmlns:a16="http://schemas.microsoft.com/office/drawing/2014/main" id="{6051AF4C-F18F-45C8-B861-08B6BFA0B3FE}"/>
-              </a:ext>
-            </a:extLst>
-          </p:cNvPr>
-          <p:cNvSpPr>
-            <a:spLocks noGrp="1"/>
-          </p:cNvSpPr>
-          <p:nvPr/>
-        </p:nvSpPr>
-        <p:spPr>
-          <a:xfrm>
-            <a:off x="0" y="0"/>
-            <a:ext cx="9144000" cy="342900"/>
-          </a:xfrm>
-          <a:prstGeom prst="rect">
-            <a:avLst/>
-          </a:prstGeom>
-          <a:solidFill>
-            <a:srgbClr val="002855"/>
-          </a:solidFill>
-          <a:ln w="0">
-            <a:noFill/>
-          </a:ln>
-        </p:spPr>
-        <p:txBody>
-          <a:bodyPr>
-            <a:noAutofit/>
-          </a:bodyPr>
-          <a:lstStyle/>
-          <a:p>
-            <a:r>
-              <a:t/>
-            </a:r>
-          </a:p>
-        </p:txBody>
-      </p:sp>
-      <p:sp>
-        <p:nvSpPr>
-          <p:cNvPr id="115" name="DSPIRA 2">
-            <a:extLst>
-              <a:ext uri="{FF2B5EF4-FFF2-40B4-BE49-F238E27FC236}">
-                <a16:creationId xmlns:a16="http://schemas.microsoft.com/office/drawing/2014/main" id="{EE318674-3B03-42C1-82D7-2ABE7E41DAA5}"/>
-              </a:ext>
-            </a:extLst>
-          </p:cNvPr>
-          <p:cNvSpPr>
-            <a:spLocks noGrp="1"/>
-          </p:cNvSpPr>
-          <p:nvPr/>
-        </p:nvSpPr>
-        <p:spPr>
-          <a:xfrm>
-            <a:off x="228600" y="57150"/>
-            <a:ext cx="8096250" cy="238125"/>
-          </a:xfrm>
-          <a:prstGeom prst="rect">
-            <a:avLst/>
-          </a:prstGeom>
-          <a:noFill/>
-          <a:ln w="0">
-            <a:noFill/>
-          </a:ln>
-        </p:spPr>
-        <p:txBody>
-          <a:bodyPr>
-            <a:noAutofit/>
-          </a:bodyPr>
-          <a:lstStyle/>
-          <a:p>
-            <a:pPr>
-              <a:defRPr sz="1200" b="1">
-                <a:solidFill>
-                  <a:srgbClr val="FFFFFF"/>
-                </a:solidFill>
-                <a:latin typeface="Arial"/>
-                <a:ea typeface="Arial"/>
-                <a:cs typeface="Arial"/>
-              </a:defRPr>
-            </a:pPr>
-            <a:r>
-              <a:rPr sz="1200" b="1">
-                <a:solidFill>
-                  <a:srgbClr val="FFFFFF"/>
-                </a:solidFill>
-                <a:latin typeface="Arial"/>
-                <a:ea typeface="Arial"/>
-                <a:cs typeface="Arial"/>
-              </a:rPr>
-              <a:t>WVU DSPIRA</a:t>
-            </a:r>
-          </a:p>
-        </p:txBody>
-      </p:sp>
-      <p:sp>
-        <p:nvSpPr>
           <p:cNvPr id="116" name="DSPIRA 3">
             <a:extLst>
               <a:ext uri="{FF2B5EF4-FFF2-40B4-BE49-F238E27FC236}">
@@ -18224,6 +18126,156 @@
                 <a:cs typeface="Arial"/>
               </a:rPr>
               <a:t>1 of 1</a:t>
+            </a:r>
+          </a:p>
+        </p:txBody>
+      </p:sp>
+      <p:sp>
+        <p:nvSpPr>
+          <p:cNvPr id="118" name="WVU DSPIRA navy band"/>
+          <p:cNvSpPr>
+            <a:spLocks noGrp="1"/>
+          </p:cNvSpPr>
+          <p:nvPr/>
+        </p:nvSpPr>
+        <p:spPr>
+          <a:xfrm>
+            <a:off x="0" y="0"/>
+            <a:ext cx="9144000" cy="323850"/>
+          </a:xfrm>
+          <a:prstGeom prst="rect">
+            <a:avLst/>
+          </a:prstGeom>
+          <a:solidFill>
+            <a:srgbClr val="002855"/>
+          </a:solidFill>
+          <a:ln w="0">
+            <a:noFill/>
+          </a:ln>
+        </p:spPr>
+      </p:sp>
+      <p:sp>
+        <p:nvSpPr>
+          <p:cNvPr id="119" name="WVU DSPIRA gold rule"/>
+          <p:cNvSpPr>
+            <a:spLocks noGrp="1"/>
+          </p:cNvSpPr>
+          <p:nvPr/>
+        </p:nvSpPr>
+        <p:spPr>
+          <a:xfrm>
+            <a:off x="0" y="323850"/>
+            <a:ext cx="9144000" cy="19050"/>
+          </a:xfrm>
+          <a:prstGeom prst="rect">
+            <a:avLst/>
+          </a:prstGeom>
+          <a:solidFill>
+            <a:srgbClr val="EEAA00"/>
+          </a:solidFill>
+          <a:ln w="0">
+            <a:noFill/>
+          </a:ln>
+        </p:spPr>
+      </p:sp>
+      <p:sp>
+        <p:nvSpPr>
+          <p:cNvPr id="120" name="WVU DSPIRA name"/>
+          <p:cNvSpPr>
+            <a:spLocks noGrp="1"/>
+          </p:cNvSpPr>
+          <p:nvPr/>
+        </p:nvSpPr>
+        <p:spPr>
+          <a:xfrm>
+            <a:off x="228600" y="19050"/>
+            <a:ext cx="2857500" cy="257175"/>
+          </a:xfrm>
+          <a:prstGeom prst="rect">
+            <a:avLst/>
+          </a:prstGeom>
+          <a:noFill/>
+          <a:ln w="0">
+            <a:noFill/>
+          </a:ln>
+        </p:spPr>
+        <p:txBody>
+          <a:bodyPr>
+            <a:noAutofit/>
+          </a:bodyPr>
+          <a:lstStyle/>
+          <a:p>
+            <a:pPr>
+              <a:defRPr sz="1600" b="1">
+                <a:solidFill>
+                  <a:srgbClr val="FFFFFF"/>
+                </a:solidFill>
+                <a:latin typeface="Arial"/>
+                <a:ea typeface="Arial"/>
+                <a:cs typeface="Arial"/>
+              </a:defRPr>
+            </a:pPr>
+            <a:r>
+              <a:rPr sz="1600" b="1">
+                <a:solidFill>
+                  <a:srgbClr val="FFFFFF"/>
+                </a:solidFill>
+                <a:latin typeface="Arial"/>
+                <a:ea typeface="Arial"/>
+                <a:cs typeface="Arial"/>
+              </a:rPr>
+              <a:t>WVU DSPIRA</a:t>
+            </a:r>
+          </a:p>
+        </p:txBody>
+      </p:sp>
+      <p:sp>
+        <p:nvSpPr>
+          <p:cNvPr id="121" name="WVU DSPIRA university"/>
+          <p:cNvSpPr>
+            <a:spLocks noGrp="1"/>
+          </p:cNvSpPr>
+          <p:nvPr/>
+        </p:nvSpPr>
+        <p:spPr>
+          <a:xfrm>
+            <a:off x="6286500" y="114300"/>
+            <a:ext cx="2628900" cy="171450"/>
+          </a:xfrm>
+          <a:prstGeom prst="rect">
+            <a:avLst/>
+          </a:prstGeom>
+          <a:noFill/>
+          <a:ln w="0">
+            <a:noFill/>
+          </a:ln>
+        </p:spPr>
+        <p:txBody>
+          <a:bodyPr>
+            <a:noAutofit/>
+          </a:bodyPr>
+          <a:lstStyle/>
+          <a:p>
+            <a:pPr algn="r">
+              <a:defRPr sz="900">
+                <a:solidFill>
+                  <a:srgbClr val="FFFFFF"/>
+                </a:solidFill>
+                <a:latin typeface="Arial"/>
+                <a:ea typeface="Arial"/>
+                <a:cs typeface="Arial"/>
+              </a:defRPr>
+            </a:pPr>
+            <a:r>
+              <a:rPr sz="900">
+                <a:solidFill>
+                  <a:srgbClr val="FFFFFF"/>
+                </a:solidFill>
+                <a:latin typeface="Arial"/>
+                <a:ea typeface="Arial"/>
+                <a:cs typeface="Arial"/>
+              </a:rPr>
+              <a:t>WEST VIRGINIA UNIVERSITY</a:t>
             </a:r>
           </a:p>
         </p:txBody>
